--- a/skills/presentations/assets/pptx/templates/02-results-demo.pptx
+++ b/skills/presentations/assets/pptx/templates/02-results-demo.pptx
@@ -5,15 +5,15 @@
     <p:sldMasterId xmlns:r="http://schemas.openxmlformats.org/officeDocument/2006/relationships" id="2147483648" r:id="rId1"/>
   </p:sldMasterIdLst>
   <p:notesMasterIdLst>
-    <p:notesMasterId r:id="Rf6873c1615784315"/>
+    <p:notesMasterId r:id="Rcf85dd42e02a4700"/>
   </p:notesMasterIdLst>
   <p:sldIdLst>
-    <p:sldId id="256" r:id="Rfe1ff3991b314a25"/>
-    <p:sldId id="257" r:id="Rd73eecd06c3b4d34"/>
-    <p:sldId id="258" r:id="Rdfa6e21c72334d31"/>
-    <p:sldId id="259" r:id="Rc05ebab2869f4e37"/>
-    <p:sldId id="260" r:id="R5dea74e3a29748a4"/>
-    <p:sldId id="261" r:id="R8561d63b5b6540b8"/>
+    <p:sldId id="256" r:id="R34e17548346d43f4"/>
+    <p:sldId id="257" r:id="R77a7b690615c4ed8"/>
+    <p:sldId id="258" r:id="Rb2f9cfb345e24d36"/>
+    <p:sldId id="259" r:id="Rca25b2744abc4595"/>
+    <p:sldId id="260" r:id="R8ebf1bdd733e48e8"/>
+    <p:sldId id="261" r:id="Rae96de8b71b74c05"/>
   </p:sldIdLst>
   <p:sldSz cx="12192000" cy="6858000"/>
   <p:notesSz cx="6858000" cy="9144000"/>

--- a/skills/presentations/assets/pptx/templates/02-results-demo.pptx
+++ b/skills/presentations/assets/pptx/templates/02-results-demo.pptx
@@ -5,15 +5,16 @@
     <p:sldMasterId xmlns:r="http://schemas.openxmlformats.org/officeDocument/2006/relationships" id="2147483648" r:id="rId1"/>
   </p:sldMasterIdLst>
   <p:notesMasterIdLst>
-    <p:notesMasterId r:id="Rcf85dd42e02a4700"/>
+    <p:notesMasterId r:id="Raafe1c0480bd4201"/>
   </p:notesMasterIdLst>
   <p:sldIdLst>
-    <p:sldId id="256" r:id="R34e17548346d43f4"/>
-    <p:sldId id="257" r:id="R77a7b690615c4ed8"/>
-    <p:sldId id="258" r:id="Rb2f9cfb345e24d36"/>
-    <p:sldId id="259" r:id="Rca25b2744abc4595"/>
-    <p:sldId id="260" r:id="R8ebf1bdd733e48e8"/>
-    <p:sldId id="261" r:id="Rae96de8b71b74c05"/>
+    <p:sldId id="256" r:id="R136f6dc482004a70"/>
+    <p:sldId id="257" r:id="R9a015f795f304e79"/>
+    <p:sldId id="258" r:id="R29de0b4f75784ca4"/>
+    <p:sldId id="259" r:id="R71a76562fdcf4ed6"/>
+    <p:sldId id="260" r:id="Rdd98ae71766c41bd"/>
+    <p:sldId id="261" r:id="R585bb1787b2945e9"/>
+    <p:sldId id="262" r:id="Rf686ab55a5f4434f"/>
   </p:sldIdLst>
   <p:sldSz cx="12192000" cy="6858000"/>
   <p:notesSz cx="6858000" cy="9144000"/>
@@ -479,6 +480,30 @@
               <a:t>Cover (template). Results readout</a:t>
             </a:r>
           </a:p>
+          <a:p xmlns:a="http://schemas.openxmlformats.org/drawingml/2006/main">
+            <a:r>
+              <a:rPr lang="en-US"/>
+              <a:t/>
+            </a:r>
+          </a:p>
+          <a:p xmlns:a="http://schemas.openxmlformats.org/drawingml/2006/main">
+            <a:r>
+              <a:rPr lang="en-US"/>
+              <a:t>Launch / silicon bring-up readout (impact first)</a:t>
+            </a:r>
+          </a:p>
+          <a:p xmlns:a="http://schemas.openxmlformats.org/drawingml/2006/main">
+            <a:r>
+              <a:rPr lang="en-US"/>
+              <a:t>MediaTek public 2nm tape-out milestone language: https://www.mediatek.com/press-room/mediatek-develops-chip-utilizing-tsmcs-2nm-process-achieving-milestones-in-performance-andpower-efficiency</a:t>
+            </a:r>
+          </a:p>
+          <a:p xmlns:a="http://schemas.openxmlformats.org/drawingml/2006/main">
+            <a:r>
+              <a:rPr lang="en-US"/>
+              <a:t>SRE Book — example postmortem impact summary shape: https://sre.google/sre-book/example-postmortem/</a:t>
+            </a:r>
+          </a:p>
         </p:txBody>
       </p:sp>
     </p:spTree>
@@ -531,7 +556,19 @@
           <a:p xmlns:a="http://schemas.openxmlformats.org/drawingml/2006/main">
             <a:r>
               <a:rPr lang="en-US"/>
-              <a:t>If pure celebration, still name residual risk.</a:t>
+              <a:t>Launch / silicon bring-up readout (impact first)</a:t>
+            </a:r>
+          </a:p>
+          <a:p xmlns:a="http://schemas.openxmlformats.org/drawingml/2006/main">
+            <a:r>
+              <a:rPr lang="en-US"/>
+              <a:t>MediaTek public 2nm tape-out milestone language: https://www.mediatek.com/press-room/mediatek-develops-chip-utilizing-tsmcs-2nm-process-achieving-milestones-in-performance-andpower-efficiency</a:t>
+            </a:r>
+          </a:p>
+          <a:p xmlns:a="http://schemas.openxmlformats.org/drawingml/2006/main">
+            <a:r>
+              <a:rPr lang="en-US"/>
+              <a:t>SRE Book — example postmortem impact summary shape: https://sre.google/sre-book/example-postmortem/</a:t>
             </a:r>
           </a:p>
         </p:txBody>
@@ -586,7 +623,7 @@
           <a:p xmlns:a="http://schemas.openxmlformats.org/drawingml/2006/main">
             <a:r>
               <a:rPr lang="en-US"/>
-              <a:t>Re-anchor to original commitment first.</a:t>
+              <a:t>If pure celebration, still name residual risk.</a:t>
             </a:r>
           </a:p>
         </p:txBody>
@@ -641,7 +678,7 @@
           <a:p xmlns:a="http://schemas.openxmlformats.org/drawingml/2006/main">
             <a:r>
               <a:rPr lang="en-US"/>
-              <a:t>Few metrics, high signal.</a:t>
+              <a:t>Re-anchor to original commitment first.</a:t>
             </a:r>
           </a:p>
         </p:txBody>
@@ -696,7 +733,7 @@
           <a:p xmlns:a="http://schemas.openxmlformats.org/drawingml/2006/main">
             <a:r>
               <a:rPr lang="en-US"/>
-              <a:t>Only process insight that changes next quarter.</a:t>
+              <a:t>Few metrics, high signal.</a:t>
             </a:r>
           </a:p>
         </p:txBody>
@@ -710,6 +747,61 @@
 </file>
 
 <file path=ppt/notesSlides/notesSlide6.xml><?xml version="1.0" encoding="utf-8"?>
+<p:notes xmlns:p="http://schemas.openxmlformats.org/presentationml/2006/main">
+  <p:cSld>
+    <p:spTree>
+      <p:nvGrpSpPr>
+        <p:cNvPr id="1" name=""/>
+        <p:cNvGrpSpPr/>
+        <p:nvPr/>
+      </p:nvGrpSpPr>
+      <p:grpSpPr>
+        <a:xfrm xmlns:a="http://schemas.openxmlformats.org/drawingml/2006/main"/>
+      </p:grpSpPr>
+      <p:sp>
+        <p:nvSpPr>
+          <p:cNvPr id="2" name="Slide Image Placeholder 1"/>
+          <p:cNvSpPr/>
+          <p:nvPr>
+            <p:ph type="sldImg" idx="0"/>
+          </p:nvPr>
+        </p:nvSpPr>
+        <p:spPr/>
+        <p:txBody>
+          <a:bodyPr xmlns:a="http://schemas.openxmlformats.org/drawingml/2006/main"/>
+          <a:lstStyle xmlns:a="http://schemas.openxmlformats.org/drawingml/2006/main"/>
+          <a:p xmlns:a="http://schemas.openxmlformats.org/drawingml/2006/main"/>
+        </p:txBody>
+      </p:sp>
+      <p:sp>
+        <p:nvSpPr>
+          <p:cNvPr id="3" name="Notes Placeholder 2"/>
+          <p:cNvSpPr/>
+          <p:nvPr>
+            <p:ph type="body" idx="1"/>
+          </p:nvPr>
+        </p:nvSpPr>
+        <p:spPr/>
+        <p:txBody>
+          <a:bodyPr xmlns:a="http://schemas.openxmlformats.org/drawingml/2006/main"/>
+          <a:lstStyle xmlns:a="http://schemas.openxmlformats.org/drawingml/2006/main"/>
+          <a:p xmlns:a="http://schemas.openxmlformats.org/drawingml/2006/main">
+            <a:r>
+              <a:rPr lang="en-US"/>
+              <a:t>Only process insight that changes next quarter.</a:t>
+            </a:r>
+          </a:p>
+        </p:txBody>
+      </p:sp>
+    </p:spTree>
+  </p:cSld>
+  <p:clrMapOvr>
+    <a:masterClrMapping xmlns:a="http://schemas.openxmlformats.org/drawingml/2006/main"/>
+  </p:clrMapOvr>
+</p:notes>
+</file>
+
+<file path=ppt/notesSlides/notesSlide7.xml><?xml version="1.0" encoding="utf-8"?>
 <p:notes xmlns:p="http://schemas.openxmlformats.org/presentationml/2006/main">
   <p:cSld>
     <p:spTree>
@@ -1079,8 +1171,8 @@
         </p:nvSpPr>
         <p:spPr>
           <a:xfrm xmlns:a="http://schemas.openxmlformats.org/drawingml/2006/main">
-            <a:off x="504000" y="1008000"/>
-            <a:ext cx="11088000" cy="324000"/>
+            <a:off x="504000" y="936000"/>
+            <a:ext cx="11088000" cy="306000"/>
           </a:xfrm>
           <a:prstGeom xmlns:a="http://schemas.openxmlformats.org/drawingml/2006/main" prst="rect">
             <a:avLst/>
@@ -1111,8 +1203,8 @@
         </p:nvSpPr>
         <p:spPr>
           <a:xfrm xmlns:a="http://schemas.openxmlformats.org/drawingml/2006/main">
-            <a:off x="504000" y="1440000"/>
-            <a:ext cx="11088000" cy="936000"/>
+            <a:off x="504000" y="1332000"/>
+            <a:ext cx="11088000" cy="900000"/>
           </a:xfrm>
           <a:prstGeom xmlns:a="http://schemas.openxmlformats.org/drawingml/2006/main" prst="rect">
             <a:avLst/>
@@ -1123,7 +1215,7 @@
           <a:lstStyle xmlns:a="http://schemas.openxmlformats.org/drawingml/2006/main"/>
           <a:p xmlns:a="http://schemas.openxmlformats.org/drawingml/2006/main">
             <a:r>
-              <a:rPr lang="en-US" sz="3400" b="1">
+              <a:rPr lang="en-US" sz="3200" b="1">
                 <a:solidFill>
                   <a:srgbClr val="FFFFFF"/>
                 </a:solidFill>
@@ -1143,8 +1235,8 @@
         </p:nvSpPr>
         <p:spPr>
           <a:xfrm xmlns:a="http://schemas.openxmlformats.org/drawingml/2006/main">
-            <a:off x="504000" y="2520000"/>
-            <a:ext cx="11088000" cy="720000"/>
+            <a:off x="504000" y="2340000"/>
+            <a:ext cx="11088000" cy="648000"/>
           </a:xfrm>
           <a:prstGeom xmlns:a="http://schemas.openxmlformats.org/drawingml/2006/main" prst="rect">
             <a:avLst/>
@@ -1155,7 +1247,7 @@
           <a:lstStyle xmlns:a="http://schemas.openxmlformats.org/drawingml/2006/main"/>
           <a:p xmlns:a="http://schemas.openxmlformats.org/drawingml/2006/main">
             <a:r>
-              <a:rPr lang="en-US" sz="1700" b="0">
+              <a:rPr lang="en-US" sz="1600" b="0">
                 <a:solidFill>
                   <a:srgbClr val="CADCFC"/>
                 </a:solidFill>
@@ -1170,6 +1262,38 @@
       <p:sp>
         <p:nvSpPr>
           <p:cNvPr id="100003" name="TextBox 4"/>
+          <p:cNvSpPr txBox="1"/>
+          <p:nvPr/>
+        </p:nvSpPr>
+        <p:spPr>
+          <a:xfrm xmlns:a="http://schemas.openxmlformats.org/drawingml/2006/main">
+            <a:off x="504000" y="3240000"/>
+            <a:ext cx="11088000" cy="576000"/>
+          </a:xfrm>
+          <a:prstGeom xmlns:a="http://schemas.openxmlformats.org/drawingml/2006/main" prst="rect">
+            <a:avLst/>
+          </a:prstGeom>
+        </p:spPr>
+        <p:txBody>
+          <a:bodyPr xmlns:a="http://schemas.openxmlformats.org/drawingml/2006/main"/>
+          <a:lstStyle xmlns:a="http://schemas.openxmlformats.org/drawingml/2006/main"/>
+          <a:p xmlns:a="http://schemas.openxmlformats.org/drawingml/2006/main">
+            <a:r>
+              <a:rPr lang="en-US" sz="1400" b="0">
+                <a:solidFill>
+                  <a:srgbClr val="A0C4E8"/>
+                </a:solidFill>
+                <a:latin typeface="Calibri"/>
+                <a:ea typeface="Calibri"/>
+              </a:rPr>
+              <a:t>Pattern: Launch / silicon bring-up readout (impact first)</a:t>
+            </a:r>
+          </a:p>
+        </p:txBody>
+      </p:sp>
+      <p:sp>
+        <p:nvSpPr>
+          <p:cNvPr id="100004" name="TextBox 5"/>
           <p:cNvSpPr txBox="1"/>
           <p:nvPr/>
         </p:nvSpPr>
@@ -1206,7 +1330,7 @@
 
 <file path=ppt/slides/slide2.xml><?xml version="1.0" encoding="utf-8"?>
 <p:sld xmlns:p="http://schemas.openxmlformats.org/presentationml/2006/main">
-  <p:cSld name="BLUF — result &amp; impact">
+  <p:cSld name="Pattern provenance">
     <p:bg>
       <p:bgPr>
         <a:solidFill xmlns:a="http://schemas.openxmlformats.org/drawingml/2006/main">
@@ -1223,7 +1347,7 @@
       <p:grpSpPr/>
       <p:sp>
         <p:nvSpPr>
-          <p:cNvPr id="100004" name="TextBox 1"/>
+          <p:cNvPr id="100005" name="TextBox 1"/>
           <p:cNvSpPr txBox="1"/>
           <p:nvPr/>
         </p:nvSpPr>
@@ -1248,14 +1372,14 @@
                 <a:latin typeface="Calibri"/>
                 <a:ea typeface="Calibri"/>
               </a:rPr>
-              <a:t>BOTTOM LINE UP FRONT</a:t>
-            </a:r>
-          </a:p>
-        </p:txBody>
-      </p:sp>
-      <p:sp>
-        <p:nvSpPr>
-          <p:cNvPr id="100005" name="TextBox 2"/>
+              <a:t>WHERE THIS DECK SHAPE COMES FROM</a:t>
+            </a:r>
+          </a:p>
+        </p:txBody>
+      </p:sp>
+      <p:sp>
+        <p:nvSpPr>
+          <p:cNvPr id="100006" name="TextBox 2"/>
           <p:cNvSpPr txBox="1"/>
           <p:nvPr/>
         </p:nvSpPr>
@@ -1280,56 +1404,21 @@
                 <a:latin typeface="Calibri"/>
                 <a:ea typeface="Calibri"/>
               </a:rPr>
-              <a:t>BLUF — result &amp; impact</a:t>
-            </a:r>
-          </a:p>
-        </p:txBody>
-      </p:sp>
-      <p:sp>
-        <p:nvSpPr>
-          <p:cNvPr id="100006" name="TextBox 3"/>
+              <a:t>Pattern provenance</a:t>
+            </a:r>
+          </a:p>
+        </p:txBody>
+      </p:sp>
+      <p:sp>
+        <p:nvSpPr>
+          <p:cNvPr id="100007" name="TextBox 3"/>
           <p:cNvSpPr txBox="1"/>
           <p:nvPr/>
         </p:nvSpPr>
         <p:spPr>
           <a:xfrm xmlns:a="http://schemas.openxmlformats.org/drawingml/2006/main">
             <a:off x="504000" y="1260000"/>
-            <a:ext cx="11088000" cy="630000"/>
-          </a:xfrm>
-          <a:prstGeom xmlns:a="http://schemas.openxmlformats.org/drawingml/2006/main" prst="rect">
-            <a:avLst/>
-          </a:prstGeom>
-          <a:solidFill xmlns:a="http://schemas.openxmlformats.org/drawingml/2006/main">
-            <a:srgbClr val="1E2761"/>
-          </a:solidFill>
-        </p:spPr>
-        <p:txBody>
-          <a:bodyPr xmlns:a="http://schemas.openxmlformats.org/drawingml/2006/main"/>
-          <a:lstStyle xmlns:a="http://schemas.openxmlformats.org/drawingml/2006/main"/>
-          <a:p xmlns:a="http://schemas.openxmlformats.org/drawingml/2006/main">
-            <a:r>
-              <a:rPr lang="en-US" sz="1400" b="1">
-                <a:solidFill>
-                  <a:srgbClr val="FFFFFF"/>
-                </a:solidFill>
-                <a:latin typeface="Calibri"/>
-                <a:ea typeface="Calibri"/>
-              </a:rPr>
-              <a:t>Status: GREEN  ·  Result: [X] delivered on [date]  ·  Ask: none / next-phase approve</a:t>
-            </a:r>
-          </a:p>
-        </p:txBody>
-      </p:sp>
-      <p:sp>
-        <p:nvSpPr>
-          <p:cNvPr id="100007" name="TextBox 4"/>
-          <p:cNvSpPr txBox="1"/>
-          <p:nvPr/>
-        </p:nvSpPr>
-        <p:spPr>
-          <a:xfrm xmlns:a="http://schemas.openxmlformats.org/drawingml/2006/main">
-            <a:off x="504000" y="1980000"/>
-            <a:ext cx="11088000" cy="4212000"/>
+            <a:ext cx="11088000" cy="4860000"/>
           </a:xfrm>
           <a:prstGeom xmlns:a="http://schemas.openxmlformats.org/drawingml/2006/main" prst="rect">
             <a:avLst/>
@@ -1343,43 +1432,19 @@
           <a:lstStyle xmlns:a="http://schemas.openxmlformats.org/drawingml/2006/main"/>
           <a:p xmlns:a="http://schemas.openxmlformats.org/drawingml/2006/main">
             <a:r>
-              <a:rPr lang="en-US" sz="1600" b="0">
-                <a:solidFill>
-                  <a:srgbClr val="1A202C"/>
-                </a:solidFill>
-                <a:latin typeface="Calibri"/>
-                <a:ea typeface="Calibri"/>
-              </a:rPr>
-              <a:t>Outcome: [one line].</a:t>
-            </a:r>
-          </a:p>
-          <a:p xmlns:a="http://schemas.openxmlformats.org/drawingml/2006/main">
-            <a:r>
-              <a:rPr lang="en-US" sz="1600" b="0">
-                <a:solidFill>
-                  <a:srgbClr val="1A202C"/>
-                </a:solidFill>
-                <a:latin typeface="Calibri"/>
-                <a:ea typeface="Calibri"/>
-              </a:rPr>
-              <a:t>Impact: [metric baseline → actual].</a:t>
-            </a:r>
-          </a:p>
-          <a:p xmlns:a="http://schemas.openxmlformats.org/drawingml/2006/main">
-            <a:r>
-              <a:rPr lang="en-US" sz="1600" b="0">
-                <a:solidFill>
-                  <a:srgbClr val="1A202C"/>
-                </a:solidFill>
-                <a:latin typeface="Calibri"/>
-                <a:ea typeface="Calibri"/>
-              </a:rPr>
-              <a:t>Linked OKR / program goal: [one line].</a:t>
-            </a:r>
-          </a:p>
-          <a:p xmlns:a="http://schemas.openxmlformats.org/drawingml/2006/main">
-            <a:r>
-              <a:rPr lang="en-US" sz="1600" b="0">
+              <a:rPr lang="en-US" sz="1500" b="0">
+                <a:solidFill>
+                  <a:srgbClr val="1A202C"/>
+                </a:solidFill>
+                <a:latin typeface="Calibri"/>
+                <a:ea typeface="Calibri"/>
+              </a:rPr>
+              <a:t>Public pattern (structure only — not a confidential company deck):</a:t>
+            </a:r>
+          </a:p>
+          <a:p xmlns:a="http://schemas.openxmlformats.org/drawingml/2006/main">
+            <a:r>
+              <a:rPr lang="en-US" sz="1500" b="0">
                 <a:solidFill>
                   <a:srgbClr val="1A202C"/>
                 </a:solidFill>
@@ -1391,21 +1456,117 @@
           </a:p>
           <a:p xmlns:a="http://schemas.openxmlformats.org/drawingml/2006/main">
             <a:r>
-              <a:rPr lang="en-US" sz="1600" b="0">
-                <a:solidFill>
-                  <a:srgbClr val="1A202C"/>
-                </a:solidFill>
-                <a:latin typeface="Calibri"/>
-                <a:ea typeface="Calibri"/>
-              </a:rPr>
-              <a:t>Residual risk or follow-ups: [or none].</a:t>
-            </a:r>
-          </a:p>
-        </p:txBody>
-      </p:sp>
-      <p:sp>
-        <p:nvSpPr>
-          <p:cNvPr id="100008" name="TextBox 5"/>
+              <a:rPr lang="en-US" sz="1500" b="0">
+                <a:solidFill>
+                  <a:srgbClr val="1A202C"/>
+                </a:solidFill>
+                <a:latin typeface="Calibri"/>
+                <a:ea typeface="Calibri"/>
+              </a:rPr>
+              <a:t>Launch / silicon bring-up readout (impact first)</a:t>
+            </a:r>
+          </a:p>
+          <a:p xmlns:a="http://schemas.openxmlformats.org/drawingml/2006/main">
+            <a:r>
+              <a:rPr lang="en-US" sz="1500" b="0">
+                <a:solidFill>
+                  <a:srgbClr val="1A202C"/>
+                </a:solidFill>
+                <a:latin typeface="Calibri"/>
+                <a:ea typeface="Calibri"/>
+              </a:rPr>
+              <a:t/>
+            </a:r>
+          </a:p>
+          <a:p xmlns:a="http://schemas.openxmlformats.org/drawingml/2006/main">
+            <a:r>
+              <a:rPr lang="en-US" sz="1500" b="0">
+                <a:solidFill>
+                  <a:srgbClr val="1A202C"/>
+                </a:solidFill>
+                <a:latin typeface="Calibri"/>
+                <a:ea typeface="Calibri"/>
+              </a:rPr>
+              <a:t>• MediaTek public 2nm tape-out milestone language</a:t>
+            </a:r>
+          </a:p>
+          <a:p xmlns:a="http://schemas.openxmlformats.org/drawingml/2006/main">
+            <a:r>
+              <a:rPr lang="en-US" sz="1500" b="0">
+                <a:solidFill>
+                  <a:srgbClr val="1A202C"/>
+                </a:solidFill>
+                <a:latin typeface="Calibri"/>
+                <a:ea typeface="Calibri"/>
+              </a:rPr>
+              <a:t>  https://www.mediatek.com/press-room/mediatek-develops-chip-utilizing-tsmcs-2nm-process-achieving-milestones-in-performance-andpower-efficiency</a:t>
+            </a:r>
+          </a:p>
+          <a:p xmlns:a="http://schemas.openxmlformats.org/drawingml/2006/main">
+            <a:r>
+              <a:rPr lang="en-US" sz="1500" b="0">
+                <a:solidFill>
+                  <a:srgbClr val="1A202C"/>
+                </a:solidFill>
+                <a:latin typeface="Calibri"/>
+                <a:ea typeface="Calibri"/>
+              </a:rPr>
+              <a:t>• SRE Book — example postmortem impact summary shape</a:t>
+            </a:r>
+          </a:p>
+          <a:p xmlns:a="http://schemas.openxmlformats.org/drawingml/2006/main">
+            <a:r>
+              <a:rPr lang="en-US" sz="1500" b="0">
+                <a:solidFill>
+                  <a:srgbClr val="1A202C"/>
+                </a:solidFill>
+                <a:latin typeface="Calibri"/>
+                <a:ea typeface="Calibri"/>
+              </a:rPr>
+              <a:t>  https://sre.google/sre-book/example-postmortem/</a:t>
+            </a:r>
+          </a:p>
+          <a:p xmlns:a="http://schemas.openxmlformats.org/drawingml/2006/main">
+            <a:r>
+              <a:rPr lang="en-US" sz="1500" b="0">
+                <a:solidFill>
+                  <a:srgbClr val="1A202C"/>
+                </a:solidFill>
+                <a:latin typeface="Calibri"/>
+                <a:ea typeface="Calibri"/>
+              </a:rPr>
+              <a:t/>
+            </a:r>
+          </a:p>
+          <a:p xmlns:a="http://schemas.openxmlformats.org/drawingml/2006/main">
+            <a:r>
+              <a:rPr lang="en-US" sz="1500" b="0">
+                <a:solidFill>
+                  <a:srgbClr val="1A202C"/>
+                </a:solidFill>
+                <a:latin typeface="Calibri"/>
+                <a:ea typeface="Calibri"/>
+              </a:rPr>
+              <a:t>How to use: copy section order and decision verbs; replace with your metrics.</a:t>
+            </a:r>
+          </a:p>
+          <a:p xmlns:a="http://schemas.openxmlformats.org/drawingml/2006/main">
+            <a:r>
+              <a:rPr lang="en-US" sz="1500" b="0">
+                <a:solidFill>
+                  <a:srgbClr val="1A202C"/>
+                </a:solidFill>
+                <a:latin typeface="Calibri"/>
+                <a:ea typeface="Calibri"/>
+              </a:rPr>
+              <a:t>In-repo: skills/presentations/classic-public-cases.md</a:t>
+            </a:r>
+          </a:p>
+        </p:txBody>
+      </p:sp>
+      <p:sp>
+        <p:nvSpPr>
+          <p:cNvPr id="100008" name="TextBox 4"/>
           <p:cNvSpPr txBox="1"/>
           <p:nvPr/>
         </p:nvSpPr>
@@ -1442,7 +1603,7 @@
 
 <file path=ppt/slides/slide3.xml><?xml version="1.0" encoding="utf-8"?>
 <p:sld xmlns:p="http://schemas.openxmlformats.org/presentationml/2006/main">
-  <p:cSld name="Goal recall (period start)">
+  <p:cSld name="BLUF — result &amp; impact">
     <p:bg>
       <p:bgPr>
         <a:solidFill xmlns:a="http://schemas.openxmlformats.org/drawingml/2006/main">
@@ -1465,8 +1626,8 @@
         </p:nvSpPr>
         <p:spPr>
           <a:xfrm xmlns:a="http://schemas.openxmlformats.org/drawingml/2006/main">
-            <a:off x="504000" y="396000"/>
-            <a:ext cx="11088000" cy="684000"/>
+            <a:off x="504000" y="270000"/>
+            <a:ext cx="11088000" cy="270000"/>
           </a:xfrm>
           <a:prstGeom xmlns:a="http://schemas.openxmlformats.org/drawingml/2006/main" prst="rect">
             <a:avLst/>
@@ -1477,14 +1638,14 @@
           <a:lstStyle xmlns:a="http://schemas.openxmlformats.org/drawingml/2006/main"/>
           <a:p xmlns:a="http://schemas.openxmlformats.org/drawingml/2006/main">
             <a:r>
-              <a:rPr lang="en-US" sz="3000" b="1">
-                <a:solidFill>
-                  <a:srgbClr val="1A202C"/>
-                </a:solidFill>
-                <a:latin typeface="Calibri"/>
-                <a:ea typeface="Calibri"/>
-              </a:rPr>
-              <a:t>Goal recall (period start)</a:t>
+              <a:rPr lang="en-US" sz="1100" b="1">
+                <a:solidFill>
+                  <a:srgbClr val="2B6CB0"/>
+                </a:solidFill>
+                <a:latin typeface="Calibri"/>
+                <a:ea typeface="Calibri"/>
+              </a:rPr>
+              <a:t>BOTTOM LINE UP FRONT</a:t>
             </a:r>
           </a:p>
         </p:txBody>
@@ -1497,8 +1658,75 @@
         </p:nvSpPr>
         <p:spPr>
           <a:xfrm xmlns:a="http://schemas.openxmlformats.org/drawingml/2006/main">
+            <a:off x="504000" y="558000"/>
+            <a:ext cx="11088000" cy="612000"/>
+          </a:xfrm>
+          <a:prstGeom xmlns:a="http://schemas.openxmlformats.org/drawingml/2006/main" prst="rect">
+            <a:avLst/>
+          </a:prstGeom>
+        </p:spPr>
+        <p:txBody>
+          <a:bodyPr xmlns:a="http://schemas.openxmlformats.org/drawingml/2006/main"/>
+          <a:lstStyle xmlns:a="http://schemas.openxmlformats.org/drawingml/2006/main"/>
+          <a:p xmlns:a="http://schemas.openxmlformats.org/drawingml/2006/main">
+            <a:r>
+              <a:rPr lang="en-US" sz="2800" b="1">
+                <a:solidFill>
+                  <a:srgbClr val="1A202C"/>
+                </a:solidFill>
+                <a:latin typeface="Calibri"/>
+                <a:ea typeface="Calibri"/>
+              </a:rPr>
+              <a:t>BLUF — result &amp; impact</a:t>
+            </a:r>
+          </a:p>
+        </p:txBody>
+      </p:sp>
+      <p:sp>
+        <p:nvSpPr>
+          <p:cNvPr id="100011" name="TextBox 3"/>
+          <p:cNvSpPr txBox="1"/>
+          <p:nvPr/>
+        </p:nvSpPr>
+        <p:spPr>
+          <a:xfrm xmlns:a="http://schemas.openxmlformats.org/drawingml/2006/main">
             <a:off x="504000" y="1260000"/>
-            <a:ext cx="11088000" cy="4860000"/>
+            <a:ext cx="11088000" cy="630000"/>
+          </a:xfrm>
+          <a:prstGeom xmlns:a="http://schemas.openxmlformats.org/drawingml/2006/main" prst="rect">
+            <a:avLst/>
+          </a:prstGeom>
+          <a:solidFill xmlns:a="http://schemas.openxmlformats.org/drawingml/2006/main">
+            <a:srgbClr val="1E2761"/>
+          </a:solidFill>
+        </p:spPr>
+        <p:txBody>
+          <a:bodyPr xmlns:a="http://schemas.openxmlformats.org/drawingml/2006/main"/>
+          <a:lstStyle xmlns:a="http://schemas.openxmlformats.org/drawingml/2006/main"/>
+          <a:p xmlns:a="http://schemas.openxmlformats.org/drawingml/2006/main">
+            <a:r>
+              <a:rPr lang="en-US" sz="1400" b="1">
+                <a:solidFill>
+                  <a:srgbClr val="FFFFFF"/>
+                </a:solidFill>
+                <a:latin typeface="Calibri"/>
+                <a:ea typeface="Calibri"/>
+              </a:rPr>
+              <a:t>Status: GREEN  ·  Result: [X] delivered on [date]  ·  Ask: none / next-phase approve</a:t>
+            </a:r>
+          </a:p>
+        </p:txBody>
+      </p:sp>
+      <p:sp>
+        <p:nvSpPr>
+          <p:cNvPr id="100012" name="TextBox 4"/>
+          <p:cNvSpPr txBox="1"/>
+          <p:nvPr/>
+        </p:nvSpPr>
+        <p:spPr>
+          <a:xfrm xmlns:a="http://schemas.openxmlformats.org/drawingml/2006/main">
+            <a:off x="504000" y="1980000"/>
+            <a:ext cx="11088000" cy="4212000"/>
           </a:xfrm>
           <a:prstGeom xmlns:a="http://schemas.openxmlformats.org/drawingml/2006/main" prst="rect">
             <a:avLst/>
@@ -1519,7 +1747,7 @@
                 <a:latin typeface="Calibri"/>
                 <a:ea typeface="Calibri"/>
               </a:rPr>
-              <a:t>Original commit: [promise].</a:t>
+              <a:t>Outcome: [one line].</a:t>
             </a:r>
           </a:p>
           <a:p xmlns:a="http://schemas.openxmlformats.org/drawingml/2006/main">
@@ -1531,7 +1759,7 @@
                 <a:latin typeface="Calibri"/>
                 <a:ea typeface="Calibri"/>
               </a:rPr>
-              <a:t>Success metric: target [T].</a:t>
+              <a:t>Impact: [metric baseline → actual].</a:t>
             </a:r>
           </a:p>
           <a:p xmlns:a="http://schemas.openxmlformats.org/drawingml/2006/main">
@@ -1543,6 +1771,18 @@
                 <a:latin typeface="Calibri"/>
                 <a:ea typeface="Calibri"/>
               </a:rPr>
+              <a:t>Linked OKR / program goal: [one line].</a:t>
+            </a:r>
+          </a:p>
+          <a:p xmlns:a="http://schemas.openxmlformats.org/drawingml/2006/main">
+            <a:r>
+              <a:rPr lang="en-US" sz="1600" b="0">
+                <a:solidFill>
+                  <a:srgbClr val="1A202C"/>
+                </a:solidFill>
+                <a:latin typeface="Calibri"/>
+                <a:ea typeface="Calibri"/>
+              </a:rPr>
               <a:t/>
             </a:r>
           </a:p>
@@ -1555,14 +1795,14 @@
                 <a:latin typeface="Calibri"/>
                 <a:ea typeface="Calibri"/>
               </a:rPr>
-              <a:t>Avoid moving the goalposts — show the same definition of done.</a:t>
-            </a:r>
-          </a:p>
-        </p:txBody>
-      </p:sp>
-      <p:sp>
-        <p:nvSpPr>
-          <p:cNvPr id="100011" name="TextBox 3"/>
+              <a:t>Residual risk or follow-ups: [or none].</a:t>
+            </a:r>
+          </a:p>
+        </p:txBody>
+      </p:sp>
+      <p:sp>
+        <p:nvSpPr>
+          <p:cNvPr id="100013" name="TextBox 5"/>
           <p:cNvSpPr txBox="1"/>
           <p:nvPr/>
         </p:nvSpPr>
@@ -1599,7 +1839,7 @@
 
 <file path=ppt/slides/slide4.xml><?xml version="1.0" encoding="utf-8"?>
 <p:sld xmlns:p="http://schemas.openxmlformats.org/presentationml/2006/main">
-  <p:cSld name="Outcome metrics">
+  <p:cSld name="Goal recall (period start)">
     <p:bg>
       <p:bgPr>
         <a:solidFill xmlns:a="http://schemas.openxmlformats.org/drawingml/2006/main">
@@ -1616,7 +1856,7 @@
       <p:grpSpPr/>
       <p:sp>
         <p:nvSpPr>
-          <p:cNvPr id="100012" name="TextBox 1"/>
+          <p:cNvPr id="100014" name="TextBox 1"/>
           <p:cNvSpPr txBox="1"/>
           <p:nvPr/>
         </p:nvSpPr>
@@ -1641,14 +1881,14 @@
                 <a:latin typeface="Calibri"/>
                 <a:ea typeface="Calibri"/>
               </a:rPr>
-              <a:t>Outcome metrics</a:t>
-            </a:r>
-          </a:p>
-        </p:txBody>
-      </p:sp>
-      <p:sp>
-        <p:nvSpPr>
-          <p:cNvPr id="100013" name="TextBox 2"/>
+              <a:t>Goal recall (period start)</a:t>
+            </a:r>
+          </a:p>
+        </p:txBody>
+      </p:sp>
+      <p:sp>
+        <p:nvSpPr>
+          <p:cNvPr id="100015" name="TextBox 2"/>
           <p:cNvSpPr txBox="1"/>
           <p:nvPr/>
         </p:nvSpPr>
@@ -1676,7 +1916,7 @@
                 <a:latin typeface="Calibri"/>
                 <a:ea typeface="Calibri"/>
               </a:rPr>
-              <a:t>Metric A: target … / actual … / Δ …</a:t>
+              <a:t>Original commit: [promise].</a:t>
             </a:r>
           </a:p>
           <a:p xmlns:a="http://schemas.openxmlformats.org/drawingml/2006/main">
@@ -1688,7 +1928,7 @@
                 <a:latin typeface="Calibri"/>
                 <a:ea typeface="Calibri"/>
               </a:rPr>
-              <a:t>Metric B: …</a:t>
+              <a:t>Success metric: target [T].</a:t>
             </a:r>
           </a:p>
           <a:p xmlns:a="http://schemas.openxmlformats.org/drawingml/2006/main">
@@ -1712,14 +1952,14 @@
                 <a:latin typeface="Calibri"/>
                 <a:ea typeface="Calibri"/>
               </a:rPr>
-              <a:t>IC examples: power −N% at iso-perf; bring-up day-k boot; coverage gate met.</a:t>
-            </a:r>
-          </a:p>
-        </p:txBody>
-      </p:sp>
-      <p:sp>
-        <p:nvSpPr>
-          <p:cNvPr id="100014" name="TextBox 3"/>
+              <a:t>Avoid moving the goalposts — show the same definition of done.</a:t>
+            </a:r>
+          </a:p>
+        </p:txBody>
+      </p:sp>
+      <p:sp>
+        <p:nvSpPr>
+          <p:cNvPr id="100016" name="TextBox 3"/>
           <p:cNvSpPr txBox="1"/>
           <p:nvPr/>
         </p:nvSpPr>
@@ -1756,7 +1996,7 @@
 
 <file path=ppt/slides/slide5.xml><?xml version="1.0" encoding="utf-8"?>
 <p:sld xmlns:p="http://schemas.openxmlformats.org/presentationml/2006/main">
-  <p:cSld name="How we got here + learnings">
+  <p:cSld name="Outcome metrics">
     <p:bg>
       <p:bgPr>
         <a:solidFill xmlns:a="http://schemas.openxmlformats.org/drawingml/2006/main">
@@ -1773,7 +2013,7 @@
       <p:grpSpPr/>
       <p:sp>
         <p:nvSpPr>
-          <p:cNvPr id="100015" name="TextBox 1"/>
+          <p:cNvPr id="100017" name="TextBox 1"/>
           <p:cNvSpPr txBox="1"/>
           <p:nvPr/>
         </p:nvSpPr>
@@ -1798,14 +2038,14 @@
                 <a:latin typeface="Calibri"/>
                 <a:ea typeface="Calibri"/>
               </a:rPr>
-              <a:t>How we got here + learnings</a:t>
-            </a:r>
-          </a:p>
-        </p:txBody>
-      </p:sp>
-      <p:sp>
-        <p:nvSpPr>
-          <p:cNvPr id="100016" name="TextBox 2"/>
+              <a:t>Outcome metrics</a:t>
+            </a:r>
+          </a:p>
+        </p:txBody>
+      </p:sp>
+      <p:sp>
+        <p:nvSpPr>
+          <p:cNvPr id="100018" name="TextBox 2"/>
           <p:cNvSpPr txBox="1"/>
           <p:nvPr/>
         </p:nvSpPr>
@@ -1833,7 +2073,7 @@
                 <a:latin typeface="Calibri"/>
                 <a:ea typeface="Calibri"/>
               </a:rPr>
-              <a:t>Three decisions that mattered:</a:t>
+              <a:t>Metric A: target … / actual … / Δ …</a:t>
             </a:r>
           </a:p>
           <a:p xmlns:a="http://schemas.openxmlformats.org/drawingml/2006/main">
@@ -1845,7 +2085,7 @@
                 <a:latin typeface="Calibri"/>
                 <a:ea typeface="Calibri"/>
               </a:rPr>
-              <a:t>1. …</a:t>
+              <a:t>Metric B: …</a:t>
             </a:r>
           </a:p>
           <a:p xmlns:a="http://schemas.openxmlformats.org/drawingml/2006/main">
@@ -1857,7 +2097,7 @@
                 <a:latin typeface="Calibri"/>
                 <a:ea typeface="Calibri"/>
               </a:rPr>
-              <a:t>2. …</a:t>
+              <a:t/>
             </a:r>
           </a:p>
           <a:p xmlns:a="http://schemas.openxmlformats.org/drawingml/2006/main">
@@ -1869,38 +2109,14 @@
                 <a:latin typeface="Calibri"/>
                 <a:ea typeface="Calibri"/>
               </a:rPr>
-              <a:t>3. …</a:t>
-            </a:r>
-          </a:p>
-          <a:p xmlns:a="http://schemas.openxmlformats.org/drawingml/2006/main">
-            <a:r>
-              <a:rPr lang="en-US" sz="1600" b="0">
-                <a:solidFill>
-                  <a:srgbClr val="1A202C"/>
-                </a:solidFill>
-                <a:latin typeface="Calibri"/>
-                <a:ea typeface="Calibri"/>
-              </a:rPr>
-              <a:t/>
-            </a:r>
-          </a:p>
-          <a:p xmlns:a="http://schemas.openxmlformats.org/drawingml/2006/main">
-            <a:r>
-              <a:rPr lang="en-US" sz="1600" b="0">
-                <a:solidFill>
-                  <a:srgbClr val="1A202C"/>
-                </a:solidFill>
-                <a:latin typeface="Calibri"/>
-                <a:ea typeface="Calibri"/>
-              </a:rPr>
-              <a:t>Keep / stop / start (one each).</a:t>
-            </a:r>
-          </a:p>
-        </p:txBody>
-      </p:sp>
-      <p:sp>
-        <p:nvSpPr>
-          <p:cNvPr id="100017" name="TextBox 3"/>
+              <a:t>IC examples: power −N% at iso-perf; bring-up day-k boot; coverage gate met.</a:t>
+            </a:r>
+          </a:p>
+        </p:txBody>
+      </p:sp>
+      <p:sp>
+        <p:nvSpPr>
+          <p:cNvPr id="100019" name="TextBox 3"/>
           <p:cNvSpPr txBox="1"/>
           <p:nvPr/>
         </p:nvSpPr>
@@ -1937,7 +2153,7 @@
 
 <file path=ppt/slides/slide6.xml><?xml version="1.0" encoding="utf-8"?>
 <p:sld xmlns:p="http://schemas.openxmlformats.org/presentationml/2006/main">
-  <p:cSld name="Decision &amp; ask">
+  <p:cSld name="How we got here + learnings">
     <p:bg>
       <p:bgPr>
         <a:solidFill xmlns:a="http://schemas.openxmlformats.org/drawingml/2006/main">
@@ -1954,14 +2170,14 @@
       <p:grpSpPr/>
       <p:sp>
         <p:nvSpPr>
-          <p:cNvPr id="100018" name="TextBox 1"/>
+          <p:cNvPr id="100020" name="TextBox 1"/>
           <p:cNvSpPr txBox="1"/>
           <p:nvPr/>
         </p:nvSpPr>
         <p:spPr>
           <a:xfrm xmlns:a="http://schemas.openxmlformats.org/drawingml/2006/main">
-            <a:off x="504000" y="270000"/>
-            <a:ext cx="11088000" cy="270000"/>
+            <a:off x="504000" y="396000"/>
+            <a:ext cx="11088000" cy="684000"/>
           </a:xfrm>
           <a:prstGeom xmlns:a="http://schemas.openxmlformats.org/drawingml/2006/main" prst="rect">
             <a:avLst/>
@@ -1972,53 +2188,21 @@
           <a:lstStyle xmlns:a="http://schemas.openxmlformats.org/drawingml/2006/main"/>
           <a:p xmlns:a="http://schemas.openxmlformats.org/drawingml/2006/main">
             <a:r>
-              <a:rPr lang="en-US" sz="1100" b="1">
-                <a:solidFill>
-                  <a:srgbClr val="2B6CB0"/>
-                </a:solidFill>
-                <a:latin typeface="Calibri"/>
-                <a:ea typeface="Calibri"/>
-              </a:rPr>
-              <a:t>WHAT WE NEED FROM THIS ROOM</a:t>
-            </a:r>
-          </a:p>
-        </p:txBody>
-      </p:sp>
-      <p:sp>
-        <p:nvSpPr>
-          <p:cNvPr id="100019" name="TextBox 2"/>
-          <p:cNvSpPr txBox="1"/>
-          <p:nvPr/>
-        </p:nvSpPr>
-        <p:spPr>
-          <a:xfrm xmlns:a="http://schemas.openxmlformats.org/drawingml/2006/main">
-            <a:off x="504000" y="558000"/>
-            <a:ext cx="11088000" cy="612000"/>
-          </a:xfrm>
-          <a:prstGeom xmlns:a="http://schemas.openxmlformats.org/drawingml/2006/main" prst="rect">
-            <a:avLst/>
-          </a:prstGeom>
-        </p:spPr>
-        <p:txBody>
-          <a:bodyPr xmlns:a="http://schemas.openxmlformats.org/drawingml/2006/main"/>
-          <a:lstStyle xmlns:a="http://schemas.openxmlformats.org/drawingml/2006/main"/>
-          <a:p xmlns:a="http://schemas.openxmlformats.org/drawingml/2006/main">
-            <a:r>
-              <a:rPr lang="en-US" sz="2800" b="1">
-                <a:solidFill>
-                  <a:srgbClr val="1A202C"/>
-                </a:solidFill>
-                <a:latin typeface="Calibri"/>
-                <a:ea typeface="Calibri"/>
-              </a:rPr>
-              <a:t>Decision &amp; ask</a:t>
-            </a:r>
-          </a:p>
-        </p:txBody>
-      </p:sp>
-      <p:sp>
-        <p:nvSpPr>
-          <p:cNvPr id="100020" name="TextBox 3"/>
+              <a:rPr lang="en-US" sz="3000" b="1">
+                <a:solidFill>
+                  <a:srgbClr val="1A202C"/>
+                </a:solidFill>
+                <a:latin typeface="Calibri"/>
+                <a:ea typeface="Calibri"/>
+              </a:rPr>
+              <a:t>How we got here + learnings</a:t>
+            </a:r>
+          </a:p>
+        </p:txBody>
+      </p:sp>
+      <p:sp>
+        <p:nvSpPr>
+          <p:cNvPr id="100021" name="TextBox 2"/>
           <p:cNvSpPr txBox="1"/>
           <p:nvPr/>
         </p:nvSpPr>
@@ -2039,6 +2223,219 @@
           <a:lstStyle xmlns:a="http://schemas.openxmlformats.org/drawingml/2006/main"/>
           <a:p xmlns:a="http://schemas.openxmlformats.org/drawingml/2006/main">
             <a:r>
+              <a:rPr lang="en-US" sz="1600" b="0">
+                <a:solidFill>
+                  <a:srgbClr val="1A202C"/>
+                </a:solidFill>
+                <a:latin typeface="Calibri"/>
+                <a:ea typeface="Calibri"/>
+              </a:rPr>
+              <a:t>Three decisions that mattered:</a:t>
+            </a:r>
+          </a:p>
+          <a:p xmlns:a="http://schemas.openxmlformats.org/drawingml/2006/main">
+            <a:r>
+              <a:rPr lang="en-US" sz="1600" b="0">
+                <a:solidFill>
+                  <a:srgbClr val="1A202C"/>
+                </a:solidFill>
+                <a:latin typeface="Calibri"/>
+                <a:ea typeface="Calibri"/>
+              </a:rPr>
+              <a:t>1. …</a:t>
+            </a:r>
+          </a:p>
+          <a:p xmlns:a="http://schemas.openxmlformats.org/drawingml/2006/main">
+            <a:r>
+              <a:rPr lang="en-US" sz="1600" b="0">
+                <a:solidFill>
+                  <a:srgbClr val="1A202C"/>
+                </a:solidFill>
+                <a:latin typeface="Calibri"/>
+                <a:ea typeface="Calibri"/>
+              </a:rPr>
+              <a:t>2. …</a:t>
+            </a:r>
+          </a:p>
+          <a:p xmlns:a="http://schemas.openxmlformats.org/drawingml/2006/main">
+            <a:r>
+              <a:rPr lang="en-US" sz="1600" b="0">
+                <a:solidFill>
+                  <a:srgbClr val="1A202C"/>
+                </a:solidFill>
+                <a:latin typeface="Calibri"/>
+                <a:ea typeface="Calibri"/>
+              </a:rPr>
+              <a:t>3. …</a:t>
+            </a:r>
+          </a:p>
+          <a:p xmlns:a="http://schemas.openxmlformats.org/drawingml/2006/main">
+            <a:r>
+              <a:rPr lang="en-US" sz="1600" b="0">
+                <a:solidFill>
+                  <a:srgbClr val="1A202C"/>
+                </a:solidFill>
+                <a:latin typeface="Calibri"/>
+                <a:ea typeface="Calibri"/>
+              </a:rPr>
+              <a:t/>
+            </a:r>
+          </a:p>
+          <a:p xmlns:a="http://schemas.openxmlformats.org/drawingml/2006/main">
+            <a:r>
+              <a:rPr lang="en-US" sz="1600" b="0">
+                <a:solidFill>
+                  <a:srgbClr val="1A202C"/>
+                </a:solidFill>
+                <a:latin typeface="Calibri"/>
+                <a:ea typeface="Calibri"/>
+              </a:rPr>
+              <a:t>Keep / stop / start (one each).</a:t>
+            </a:r>
+          </a:p>
+        </p:txBody>
+      </p:sp>
+      <p:sp>
+        <p:nvSpPr>
+          <p:cNvPr id="100022" name="TextBox 3"/>
+          <p:cNvSpPr txBox="1"/>
+          <p:nvPr/>
+        </p:nvSpPr>
+        <p:spPr>
+          <a:xfrm xmlns:a="http://schemas.openxmlformats.org/drawingml/2006/main">
+            <a:off x="504000" y="6426000"/>
+            <a:ext cx="11088000" cy="306000"/>
+          </a:xfrm>
+          <a:prstGeom xmlns:a="http://schemas.openxmlformats.org/drawingml/2006/main" prst="rect">
+            <a:avLst/>
+          </a:prstGeom>
+        </p:spPr>
+        <p:txBody>
+          <a:bodyPr xmlns:a="http://schemas.openxmlformats.org/drawingml/2006/main"/>
+          <a:lstStyle xmlns:a="http://schemas.openxmlformats.org/drawingml/2006/main"/>
+          <a:p xmlns:a="http://schemas.openxmlformats.org/drawingml/2006/main">
+            <a:r>
+              <a:rPr lang="en-US" sz="1100" b="0">
+                <a:solidFill>
+                  <a:srgbClr val="718096"/>
+                </a:solidFill>
+                <a:latin typeface="Calibri"/>
+                <a:ea typeface="Calibri"/>
+              </a:rPr>
+              <a:t>Team X  ·  Program Alpha  ·  Qn YYYY  ·  TEMPLATE — replace placeholders</a:t>
+            </a:r>
+          </a:p>
+        </p:txBody>
+      </p:sp>
+    </p:spTree>
+  </p:cSld>
+</p:sld>
+</file>
+
+<file path=ppt/slides/slide7.xml><?xml version="1.0" encoding="utf-8"?>
+<p:sld xmlns:p="http://schemas.openxmlformats.org/presentationml/2006/main">
+  <p:cSld name="Decision &amp; ask">
+    <p:bg>
+      <p:bgPr>
+        <a:solidFill xmlns:a="http://schemas.openxmlformats.org/drawingml/2006/main">
+          <a:srgbClr val="F4F7FC"/>
+        </a:solidFill>
+      </p:bgPr>
+    </p:bg>
+    <p:spTree>
+      <p:nvGrpSpPr>
+        <p:cNvPr id="1" name=""/>
+        <p:cNvGrpSpPr/>
+        <p:nvPr/>
+      </p:nvGrpSpPr>
+      <p:grpSpPr/>
+      <p:sp>
+        <p:nvSpPr>
+          <p:cNvPr id="100023" name="TextBox 1"/>
+          <p:cNvSpPr txBox="1"/>
+          <p:nvPr/>
+        </p:nvSpPr>
+        <p:spPr>
+          <a:xfrm xmlns:a="http://schemas.openxmlformats.org/drawingml/2006/main">
+            <a:off x="504000" y="270000"/>
+            <a:ext cx="11088000" cy="270000"/>
+          </a:xfrm>
+          <a:prstGeom xmlns:a="http://schemas.openxmlformats.org/drawingml/2006/main" prst="rect">
+            <a:avLst/>
+          </a:prstGeom>
+        </p:spPr>
+        <p:txBody>
+          <a:bodyPr xmlns:a="http://schemas.openxmlformats.org/drawingml/2006/main"/>
+          <a:lstStyle xmlns:a="http://schemas.openxmlformats.org/drawingml/2006/main"/>
+          <a:p xmlns:a="http://schemas.openxmlformats.org/drawingml/2006/main">
+            <a:r>
+              <a:rPr lang="en-US" sz="1100" b="1">
+                <a:solidFill>
+                  <a:srgbClr val="2B6CB0"/>
+                </a:solidFill>
+                <a:latin typeface="Calibri"/>
+                <a:ea typeface="Calibri"/>
+              </a:rPr>
+              <a:t>WHAT WE NEED FROM THIS ROOM</a:t>
+            </a:r>
+          </a:p>
+        </p:txBody>
+      </p:sp>
+      <p:sp>
+        <p:nvSpPr>
+          <p:cNvPr id="100024" name="TextBox 2"/>
+          <p:cNvSpPr txBox="1"/>
+          <p:nvPr/>
+        </p:nvSpPr>
+        <p:spPr>
+          <a:xfrm xmlns:a="http://schemas.openxmlformats.org/drawingml/2006/main">
+            <a:off x="504000" y="558000"/>
+            <a:ext cx="11088000" cy="612000"/>
+          </a:xfrm>
+          <a:prstGeom xmlns:a="http://schemas.openxmlformats.org/drawingml/2006/main" prst="rect">
+            <a:avLst/>
+          </a:prstGeom>
+        </p:spPr>
+        <p:txBody>
+          <a:bodyPr xmlns:a="http://schemas.openxmlformats.org/drawingml/2006/main"/>
+          <a:lstStyle xmlns:a="http://schemas.openxmlformats.org/drawingml/2006/main"/>
+          <a:p xmlns:a="http://schemas.openxmlformats.org/drawingml/2006/main">
+            <a:r>
+              <a:rPr lang="en-US" sz="2800" b="1">
+                <a:solidFill>
+                  <a:srgbClr val="1A202C"/>
+                </a:solidFill>
+                <a:latin typeface="Calibri"/>
+                <a:ea typeface="Calibri"/>
+              </a:rPr>
+              <a:t>Decision &amp; ask</a:t>
+            </a:r>
+          </a:p>
+        </p:txBody>
+      </p:sp>
+      <p:sp>
+        <p:nvSpPr>
+          <p:cNvPr id="100025" name="TextBox 3"/>
+          <p:cNvSpPr txBox="1"/>
+          <p:nvPr/>
+        </p:nvSpPr>
+        <p:spPr>
+          <a:xfrm xmlns:a="http://schemas.openxmlformats.org/drawingml/2006/main">
+            <a:off x="504000" y="1260000"/>
+            <a:ext cx="11088000" cy="4860000"/>
+          </a:xfrm>
+          <a:prstGeom xmlns:a="http://schemas.openxmlformats.org/drawingml/2006/main" prst="rect">
+            <a:avLst/>
+          </a:prstGeom>
+          <a:solidFill xmlns:a="http://schemas.openxmlformats.org/drawingml/2006/main">
+            <a:srgbClr val="FFFFFF"/>
+          </a:solidFill>
+        </p:spPr>
+        <p:txBody>
+          <a:bodyPr xmlns:a="http://schemas.openxmlformats.org/drawingml/2006/main"/>
+          <a:lstStyle xmlns:a="http://schemas.openxmlformats.org/drawingml/2006/main"/>
+          <a:p xmlns:a="http://schemas.openxmlformats.org/drawingml/2006/main">
+            <a:r>
               <a:rPr lang="en-US" sz="1700" b="0">
                 <a:solidFill>
                   <a:srgbClr val="1A202C"/>
@@ -2089,7 +2486,7 @@
       </p:sp>
       <p:sp>
         <p:nvSpPr>
-          <p:cNvPr id="100021" name="TextBox 4"/>
+          <p:cNvPr id="100026" name="TextBox 4"/>
           <p:cNvSpPr txBox="1"/>
           <p:nvPr/>
         </p:nvSpPr>

--- a/skills/presentations/assets/pptx/templates/02-results-demo.pptx
+++ b/skills/presentations/assets/pptx/templates/02-results-demo.pptx
@@ -5,16 +5,16 @@
     <p:sldMasterId xmlns:r="http://schemas.openxmlformats.org/officeDocument/2006/relationships" id="2147483648" r:id="rId1"/>
   </p:sldMasterIdLst>
   <p:notesMasterIdLst>
-    <p:notesMasterId r:id="Raafe1c0480bd4201"/>
+    <p:notesMasterId r:id="R6f2a29765d184017"/>
   </p:notesMasterIdLst>
   <p:sldIdLst>
-    <p:sldId id="256" r:id="R136f6dc482004a70"/>
-    <p:sldId id="257" r:id="R9a015f795f304e79"/>
-    <p:sldId id="258" r:id="R29de0b4f75784ca4"/>
-    <p:sldId id="259" r:id="R71a76562fdcf4ed6"/>
-    <p:sldId id="260" r:id="Rdd98ae71766c41bd"/>
-    <p:sldId id="261" r:id="R585bb1787b2945e9"/>
-    <p:sldId id="262" r:id="Rf686ab55a5f4434f"/>
+    <p:sldId id="256" r:id="Re2dd47574d4a4cb3"/>
+    <p:sldId id="257" r:id="Rcbec10f163044c7a"/>
+    <p:sldId id="258" r:id="R4f10e888e8bf4f6a"/>
+    <p:sldId id="259" r:id="R68f7a1c5eec44ab0"/>
+    <p:sldId id="260" r:id="Rb379ab7297af4998"/>
+    <p:sldId id="261" r:id="R2e9aaeb74bf64554"/>
+    <p:sldId id="262" r:id="R66cea2d97e2b4ef2"/>
   </p:sldIdLst>
   <p:sldSz cx="12192000" cy="6858000"/>
   <p:notesSz cx="6858000" cy="9144000"/>
@@ -1559,7 +1559,19 @@
                 <a:latin typeface="Calibri"/>
                 <a:ea typeface="Calibri"/>
               </a:rPr>
-              <a:t>In-repo: skills/presentations/classic-public-cases.md</a:t>
+              <a:t>CONTENT TEMPLATE ONLY — do not copy visual design (colors, margins, fonts) as a brand system.</a:t>
+            </a:r>
+          </a:p>
+          <a:p xmlns:a="http://schemas.openxmlformats.org/drawingml/2006/main">
+            <a:r>
+              <a:rPr lang="en-US" sz="1500" b="0">
+                <a:solidFill>
+                  <a:srgbClr val="1A202C"/>
+                </a:solidFill>
+                <a:latin typeface="Calibri"/>
+                <a:ea typeface="Calibri"/>
+              </a:rPr>
+              <a:t>In-repo: skills/presentations/classic-public-cases.md · assets/README.md (agent notice)</a:t>
             </a:r>
           </a:p>
         </p:txBody>
